--- a/Phoenix_StockPitch.pptx
+++ b/Phoenix_StockPitch.pptx
@@ -13,12 +13,16 @@
     <p:sldId id="261" r:id="rId7"/>
     <p:sldId id="262" r:id="rId8"/>
     <p:sldId id="263" r:id="rId9"/>
-    <p:sldId id="269" r:id="rId10"/>
-    <p:sldId id="265" r:id="rId11"/>
-    <p:sldId id="266" r:id="rId12"/>
-    <p:sldId id="267" r:id="rId13"/>
-    <p:sldId id="270" r:id="rId14"/>
-    <p:sldId id="268" r:id="rId15"/>
+    <p:sldId id="265" r:id="rId10"/>
+    <p:sldId id="266" r:id="rId11"/>
+    <p:sldId id="267" r:id="rId12"/>
+    <p:sldId id="270" r:id="rId13"/>
+    <p:sldId id="272" r:id="rId14"/>
+    <p:sldId id="274" r:id="rId15"/>
+    <p:sldId id="273" r:id="rId16"/>
+    <p:sldId id="268" r:id="rId17"/>
+    <p:sldId id="271" r:id="rId18"/>
+    <p:sldId id="269" r:id="rId19"/>
   </p:sldIdLst>
   <p:sldSz cx="12192000" cy="6858000"/>
   <p:notesSz cx="6858000" cy="9144000"/>
@@ -117,6 +121,11 @@
       </a:defRPr>
     </a:lvl9pPr>
   </p:defaultTextStyle>
+  <p:extLst>
+    <p:ext uri="{EFAFB233-063F-42B5-8137-9DF3F51BA10A}">
+      <p15:sldGuideLst xmlns:p15="http://schemas.microsoft.com/office/powerpoint/2012/main"/>
+    </p:ext>
+  </p:extLst>
 </p:presentation>
 </file>
 
@@ -327,7 +336,7 @@
           <a:p>
             <a:fld id="{621DE611-1139-46AD-9E7C-5A6D20A55351}" type="datetimeFigureOut">
               <a:rPr lang="en-US" smtClean="0"/>
-              <a:t>2/11/2026</a:t>
+              <a:t>2/12/2026</a:t>
             </a:fld>
             <a:endParaRPr lang="en-US"/>
           </a:p>
@@ -517,7 +526,7 @@
           <a:p>
             <a:fld id="{621DE611-1139-46AD-9E7C-5A6D20A55351}" type="datetimeFigureOut">
               <a:rPr lang="en-US" smtClean="0"/>
-              <a:t>2/11/2026</a:t>
+              <a:t>2/12/2026</a:t>
             </a:fld>
             <a:endParaRPr lang="en-US"/>
           </a:p>
@@ -697,7 +706,7 @@
           <a:p>
             <a:fld id="{621DE611-1139-46AD-9E7C-5A6D20A55351}" type="datetimeFigureOut">
               <a:rPr lang="en-US" smtClean="0"/>
-              <a:t>2/11/2026</a:t>
+              <a:t>2/12/2026</a:t>
             </a:fld>
             <a:endParaRPr lang="en-US"/>
           </a:p>
@@ -867,7 +876,7 @@
           <a:p>
             <a:fld id="{621DE611-1139-46AD-9E7C-5A6D20A55351}" type="datetimeFigureOut">
               <a:rPr lang="en-US" smtClean="0"/>
-              <a:t>2/11/2026</a:t>
+              <a:t>2/12/2026</a:t>
             </a:fld>
             <a:endParaRPr lang="en-US"/>
           </a:p>
@@ -1123,7 +1132,7 @@
           <a:p>
             <a:fld id="{621DE611-1139-46AD-9E7C-5A6D20A55351}" type="datetimeFigureOut">
               <a:rPr lang="en-US" smtClean="0"/>
-              <a:t>2/11/2026</a:t>
+              <a:t>2/12/2026</a:t>
             </a:fld>
             <a:endParaRPr lang="en-US"/>
           </a:p>
@@ -1411,7 +1420,7 @@
           <a:p>
             <a:fld id="{621DE611-1139-46AD-9E7C-5A6D20A55351}" type="datetimeFigureOut">
               <a:rPr lang="en-US" smtClean="0"/>
-              <a:t>2/11/2026</a:t>
+              <a:t>2/12/2026</a:t>
             </a:fld>
             <a:endParaRPr lang="en-US"/>
           </a:p>
@@ -1849,7 +1858,7 @@
           <a:p>
             <a:fld id="{621DE611-1139-46AD-9E7C-5A6D20A55351}" type="datetimeFigureOut">
               <a:rPr lang="en-US" smtClean="0"/>
-              <a:t>2/11/2026</a:t>
+              <a:t>2/12/2026</a:t>
             </a:fld>
             <a:endParaRPr lang="en-US"/>
           </a:p>
@@ -1967,7 +1976,7 @@
           <a:p>
             <a:fld id="{621DE611-1139-46AD-9E7C-5A6D20A55351}" type="datetimeFigureOut">
               <a:rPr lang="en-US" smtClean="0"/>
-              <a:t>2/11/2026</a:t>
+              <a:t>2/12/2026</a:t>
             </a:fld>
             <a:endParaRPr lang="en-US"/>
           </a:p>
@@ -2062,7 +2071,7 @@
           <a:p>
             <a:fld id="{621DE611-1139-46AD-9E7C-5A6D20A55351}" type="datetimeFigureOut">
               <a:rPr lang="en-US" smtClean="0"/>
-              <a:t>2/11/2026</a:t>
+              <a:t>2/12/2026</a:t>
             </a:fld>
             <a:endParaRPr lang="en-US"/>
           </a:p>
@@ -2418,7 +2427,7 @@
           <a:p>
             <a:fld id="{621DE611-1139-46AD-9E7C-5A6D20A55351}" type="datetimeFigureOut">
               <a:rPr lang="en-US" smtClean="0"/>
-              <a:t>2/11/2026</a:t>
+              <a:t>2/12/2026</a:t>
             </a:fld>
             <a:endParaRPr lang="en-US"/>
           </a:p>
@@ -2734,7 +2743,7 @@
           <a:p>
             <a:fld id="{621DE611-1139-46AD-9E7C-5A6D20A55351}" type="datetimeFigureOut">
               <a:rPr lang="en-US" smtClean="0"/>
-              <a:t>2/11/2026</a:t>
+              <a:t>2/12/2026</a:t>
             </a:fld>
             <a:endParaRPr lang="en-US"/>
           </a:p>
@@ -2967,7 +2976,7 @@
           <a:p>
             <a:fld id="{621DE611-1139-46AD-9E7C-5A6D20A55351}" type="datetimeFigureOut">
               <a:rPr lang="en-US" smtClean="0"/>
-              <a:t>2/11/2026</a:t>
+              <a:t>2/12/2026</a:t>
             </a:fld>
             <a:endParaRPr lang="en-US"/>
           </a:p>
@@ -3482,7 +3491,7 @@
         <p:cNvPr id="1" name="">
           <a:extLst>
             <a:ext uri="{FF2B5EF4-FFF2-40B4-BE49-F238E27FC236}">
-              <a16:creationId xmlns:a16="http://schemas.microsoft.com/office/drawing/2014/main" id="{AEF47DA7-F3D9-4790-2A75-AC65697DEC05}"/>
+              <a16:creationId xmlns:a16="http://schemas.microsoft.com/office/drawing/2014/main" id="{0E85190D-635A-3EE0-E360-5ABCEB1DF626}"/>
             </a:ext>
           </a:extLst>
         </p:cNvPr>
@@ -3502,7 +3511,7 @@
           <p:cNvPr id="2" name="Title 1">
             <a:extLst>
               <a:ext uri="{FF2B5EF4-FFF2-40B4-BE49-F238E27FC236}">
-                <a16:creationId xmlns:a16="http://schemas.microsoft.com/office/drawing/2014/main" id="{01175F15-DDF8-D354-2B0B-DFEA2F35D25A}"/>
+                <a16:creationId xmlns:a16="http://schemas.microsoft.com/office/drawing/2014/main" id="{B9A3BBCC-1800-4D5D-71D6-AEC81558ACA7}"/>
               </a:ext>
             </a:extLst>
           </p:cNvPr>
@@ -3537,7 +3546,7 @@
           <p:cNvPr id="6" name="Title 1">
             <a:extLst>
               <a:ext uri="{FF2B5EF4-FFF2-40B4-BE49-F238E27FC236}">
-                <a16:creationId xmlns:a16="http://schemas.microsoft.com/office/drawing/2014/main" id="{E982C569-D936-18DC-96ED-1689499C0AD5}"/>
+                <a16:creationId xmlns:a16="http://schemas.microsoft.com/office/drawing/2014/main" id="{7E25A709-17CA-11E9-AFC6-794134FE91C5}"/>
               </a:ext>
             </a:extLst>
           </p:cNvPr>
@@ -3591,7 +3600,7 @@
           <p:cNvPr id="4" name="TextBox 3">
             <a:extLst>
               <a:ext uri="{FF2B5EF4-FFF2-40B4-BE49-F238E27FC236}">
-                <a16:creationId xmlns:a16="http://schemas.microsoft.com/office/drawing/2014/main" id="{A3BD51F6-2294-8488-9107-BC71ABC87666}"/>
+                <a16:creationId xmlns:a16="http://schemas.microsoft.com/office/drawing/2014/main" id="{35A4B6E6-21E5-7571-7E9A-6AF5712AF00F}"/>
               </a:ext>
             </a:extLst>
           </p:cNvPr>
@@ -3635,10 +3644,10 @@
       </p:sp>
       <p:pic>
         <p:nvPicPr>
-          <p:cNvPr id="8" name="Picture 7">
+          <p:cNvPr id="5" name="Graphic 4">
             <a:extLst>
               <a:ext uri="{FF2B5EF4-FFF2-40B4-BE49-F238E27FC236}">
-                <a16:creationId xmlns:a16="http://schemas.microsoft.com/office/drawing/2014/main" id="{F995903A-C7E4-087D-D545-6710807FEE22}"/>
+                <a16:creationId xmlns:a16="http://schemas.microsoft.com/office/drawing/2014/main" id="{1BDABB4B-6A49-ADD8-EA0F-6F39EA7269AE}"/>
               </a:ext>
             </a:extLst>
           </p:cNvPr>
@@ -3650,84 +3659,29 @@
         <p:blipFill>
           <a:blip r:embed="rId2">
             <a:extLst>
-              <a:ext uri="{28A0092B-C50C-407E-A947-70E740481C1C}">
-                <a14:useLocalDpi xmlns:a14="http://schemas.microsoft.com/office/drawing/2010/main" val="0"/>
+              <a:ext uri="{96DAC541-7B7A-43D3-8B79-37D633B846F1}">
+                <asvg:svgBlip xmlns:asvg="http://schemas.microsoft.com/office/drawing/2016/SVG/main" r:embed="rId3"/>
               </a:ext>
             </a:extLst>
           </a:blip>
-          <a:srcRect l="30694" t="29369" r="30486" b="29239"/>
           <a:stretch>
             <a:fillRect/>
           </a:stretch>
         </p:blipFill>
         <p:spPr>
           <a:xfrm>
-            <a:off x="1600199" y="1651000"/>
-            <a:ext cx="8686801" cy="3931596"/>
+            <a:off x="1226079" y="1377595"/>
+            <a:ext cx="9340322" cy="4636518"/>
           </a:xfrm>
           <a:prstGeom prst="rect">
             <a:avLst/>
           </a:prstGeom>
         </p:spPr>
       </p:pic>
-      <p:sp>
-        <p:nvSpPr>
-          <p:cNvPr id="9" name="Rectangle 8">
-            <a:extLst>
-              <a:ext uri="{FF2B5EF4-FFF2-40B4-BE49-F238E27FC236}">
-                <a16:creationId xmlns:a16="http://schemas.microsoft.com/office/drawing/2014/main" id="{5E2E30EF-F1E7-C4B1-0EC4-CC296199D4FF}"/>
-              </a:ext>
-            </a:extLst>
-          </p:cNvPr>
-          <p:cNvSpPr/>
-          <p:nvPr/>
-        </p:nvSpPr>
-        <p:spPr>
-          <a:xfrm>
-            <a:off x="1600199" y="2413000"/>
-            <a:ext cx="8585201" cy="355600"/>
-          </a:xfrm>
-          <a:prstGeom prst="rect">
-            <a:avLst/>
-          </a:prstGeom>
-          <a:solidFill>
-            <a:srgbClr val="FFFF00">
-              <a:alpha val="25000"/>
-            </a:srgbClr>
-          </a:solidFill>
-          <a:ln>
-            <a:noFill/>
-          </a:ln>
-        </p:spPr>
-        <p:style>
-          <a:lnRef idx="2">
-            <a:schemeClr val="accent1">
-              <a:shade val="15000"/>
-            </a:schemeClr>
-          </a:lnRef>
-          <a:fillRef idx="1">
-            <a:schemeClr val="accent1"/>
-          </a:fillRef>
-          <a:effectRef idx="0">
-            <a:schemeClr val="accent1"/>
-          </a:effectRef>
-          <a:fontRef idx="minor">
-            <a:schemeClr val="lt1"/>
-          </a:fontRef>
-        </p:style>
-        <p:txBody>
-          <a:bodyPr rtlCol="0" anchor="ctr"/>
-          <a:lstStyle/>
-          <a:p>
-            <a:pPr algn="ctr"/>
-            <a:endParaRPr lang="en-US"/>
-          </a:p>
-        </p:txBody>
-      </p:sp>
     </p:spTree>
     <p:extLst>
       <p:ext uri="{BB962C8B-B14F-4D97-AF65-F5344CB8AC3E}">
-        <p14:creationId xmlns:p14="http://schemas.microsoft.com/office/powerpoint/2010/main" val="3854890432"/>
+        <p14:creationId xmlns:p14="http://schemas.microsoft.com/office/powerpoint/2010/main" val="3855355408"/>
       </p:ext>
     </p:extLst>
   </p:cSld>
@@ -3745,7 +3699,7 @@
         <p:cNvPr id="1" name="">
           <a:extLst>
             <a:ext uri="{FF2B5EF4-FFF2-40B4-BE49-F238E27FC236}">
-              <a16:creationId xmlns:a16="http://schemas.microsoft.com/office/drawing/2014/main" id="{0E85190D-635A-3EE0-E360-5ABCEB1DF626}"/>
+              <a16:creationId xmlns:a16="http://schemas.microsoft.com/office/drawing/2014/main" id="{63E9CC9B-B87B-420C-88B5-472CF2003311}"/>
             </a:ext>
           </a:extLst>
         </p:cNvPr>
@@ -3760,12 +3714,86 @@
           <a:chExt cx="0" cy="0"/>
         </a:xfrm>
       </p:grpSpPr>
+      <p:pic>
+        <p:nvPicPr>
+          <p:cNvPr id="7" name="Picture 6">
+            <a:extLst>
+              <a:ext uri="{FF2B5EF4-FFF2-40B4-BE49-F238E27FC236}">
+                <a16:creationId xmlns:a16="http://schemas.microsoft.com/office/drawing/2014/main" id="{086FBB2B-E2CD-B984-C1BD-E1233CE389BF}"/>
+              </a:ext>
+            </a:extLst>
+          </p:cNvPr>
+          <p:cNvPicPr>
+            <a:picLocks noChangeAspect="1"/>
+          </p:cNvPicPr>
+          <p:nvPr/>
+        </p:nvPicPr>
+        <p:blipFill>
+          <a:blip r:embed="rId2">
+            <a:extLst>
+              <a:ext uri="{28A0092B-C50C-407E-A947-70E740481C1C}">
+                <a14:useLocalDpi xmlns:a14="http://schemas.microsoft.com/office/drawing/2010/main" val="0"/>
+              </a:ext>
+            </a:extLst>
+          </a:blip>
+          <a:srcRect t="16816"/>
+          <a:stretch>
+            <a:fillRect/>
+          </a:stretch>
+        </p:blipFill>
+        <p:spPr>
+          <a:xfrm>
+            <a:off x="1410034" y="1222475"/>
+            <a:ext cx="9371932" cy="5168993"/>
+          </a:xfrm>
+          <a:prstGeom prst="rect">
+            <a:avLst/>
+          </a:prstGeom>
+        </p:spPr>
+      </p:pic>
+      <p:pic>
+        <p:nvPicPr>
+          <p:cNvPr id="8" name="Picture 7">
+            <a:extLst>
+              <a:ext uri="{FF2B5EF4-FFF2-40B4-BE49-F238E27FC236}">
+                <a16:creationId xmlns:a16="http://schemas.microsoft.com/office/drawing/2014/main" id="{387F04C5-D71F-6631-4FA6-7E15A1B80724}"/>
+              </a:ext>
+            </a:extLst>
+          </p:cNvPr>
+          <p:cNvPicPr>
+            <a:picLocks noChangeAspect="1"/>
+          </p:cNvPicPr>
+          <p:nvPr/>
+        </p:nvPicPr>
+        <p:blipFill>
+          <a:blip r:embed="rId2">
+            <a:extLst>
+              <a:ext uri="{28A0092B-C50C-407E-A947-70E740481C1C}">
+                <a14:useLocalDpi xmlns:a14="http://schemas.microsoft.com/office/drawing/2010/main" val="0"/>
+              </a:ext>
+            </a:extLst>
+          </a:blip>
+          <a:srcRect t="-167" r="75207" b="84551"/>
+          <a:stretch>
+            <a:fillRect/>
+          </a:stretch>
+        </p:blipFill>
+        <p:spPr>
+          <a:xfrm>
+            <a:off x="9765966" y="221575"/>
+            <a:ext cx="2031999" cy="848563"/>
+          </a:xfrm>
+          <a:prstGeom prst="rect">
+            <a:avLst/>
+          </a:prstGeom>
+        </p:spPr>
+      </p:pic>
       <p:sp>
         <p:nvSpPr>
           <p:cNvPr id="2" name="Title 1">
             <a:extLst>
               <a:ext uri="{FF2B5EF4-FFF2-40B4-BE49-F238E27FC236}">
-                <a16:creationId xmlns:a16="http://schemas.microsoft.com/office/drawing/2014/main" id="{B9A3BBCC-1800-4D5D-71D6-AEC81558ACA7}"/>
+                <a16:creationId xmlns:a16="http://schemas.microsoft.com/office/drawing/2014/main" id="{32E9DEDB-3EAB-E4BF-FE1B-3F9D7627EF4D}"/>
               </a:ext>
             </a:extLst>
           </p:cNvPr>
@@ -3789,8 +3817,12 @@
           <a:lstStyle/>
           <a:p>
             <a:r>
+              <a:rPr lang="es-CR" sz="3600" dirty="0"/>
+              <a:t>D</a:t>
+            </a:r>
+            <a:r>
               <a:rPr lang="en-US" sz="3600" dirty="0"/>
-              <a:t>Attractive Relative Valuation Within LNG &amp; Midstream Peers</a:t>
+              <a:t>CF Valuation</a:t>
             </a:r>
           </a:p>
         </p:txBody>
@@ -3800,7 +3832,7 @@
           <p:cNvPr id="6" name="Title 1">
             <a:extLst>
               <a:ext uri="{FF2B5EF4-FFF2-40B4-BE49-F238E27FC236}">
-                <a16:creationId xmlns:a16="http://schemas.microsoft.com/office/drawing/2014/main" id="{7E25A709-17CA-11E9-AFC6-794134FE91C5}"/>
+                <a16:creationId xmlns:a16="http://schemas.microsoft.com/office/drawing/2014/main" id="{A346A5D0-E3B3-5881-6429-7BD1DA1BEC08}"/>
               </a:ext>
             </a:extLst>
           </p:cNvPr>
@@ -3844,7 +3876,7 @@
           <a:p>
             <a:r>
               <a:rPr lang="en-US" sz="1800" dirty="0"/>
-              <a:t>Cheniere’s  ~12x P/E compares favorably to peers trading 20-35x earnings.</a:t>
+              <a:t>Even assuming margin normalization and a modest exit multiple, intrinsic value remains near current levels.</a:t>
             </a:r>
           </a:p>
         </p:txBody>
@@ -3854,7 +3886,7 @@
           <p:cNvPr id="4" name="TextBox 3">
             <a:extLst>
               <a:ext uri="{FF2B5EF4-FFF2-40B4-BE49-F238E27FC236}">
-                <a16:creationId xmlns:a16="http://schemas.microsoft.com/office/drawing/2014/main" id="{35A4B6E6-21E5-7571-7E9A-6AF5712AF00F}"/>
+                <a16:creationId xmlns:a16="http://schemas.microsoft.com/office/drawing/2014/main" id="{82497020-C793-60D4-1051-A611624CC743}"/>
               </a:ext>
             </a:extLst>
           </p:cNvPr>
@@ -3887,7 +3919,7 @@
             </a:r>
             <a:r>
               <a:rPr lang="en-US" sz="1050" dirty="0" err="1"/>
-              <a:t>FinViz</a:t>
+              <a:t>Factset</a:t>
             </a:r>
             <a:r>
               <a:rPr lang="en-US" sz="1050" dirty="0"/>
@@ -3896,46 +3928,10 @@
           </a:p>
         </p:txBody>
       </p:sp>
-      <p:pic>
-        <p:nvPicPr>
-          <p:cNvPr id="5" name="Graphic 4">
-            <a:extLst>
-              <a:ext uri="{FF2B5EF4-FFF2-40B4-BE49-F238E27FC236}">
-                <a16:creationId xmlns:a16="http://schemas.microsoft.com/office/drawing/2014/main" id="{1BDABB4B-6A49-ADD8-EA0F-6F39EA7269AE}"/>
-              </a:ext>
-            </a:extLst>
-          </p:cNvPr>
-          <p:cNvPicPr>
-            <a:picLocks noChangeAspect="1"/>
-          </p:cNvPicPr>
-          <p:nvPr/>
-        </p:nvPicPr>
-        <p:blipFill>
-          <a:blip r:embed="rId2">
-            <a:extLst>
-              <a:ext uri="{96DAC541-7B7A-43D3-8B79-37D633B846F1}">
-                <asvg:svgBlip xmlns:asvg="http://schemas.microsoft.com/office/drawing/2016/SVG/main" r:embed="rId3"/>
-              </a:ext>
-            </a:extLst>
-          </a:blip>
-          <a:stretch>
-            <a:fillRect/>
-          </a:stretch>
-        </p:blipFill>
-        <p:spPr>
-          <a:xfrm>
-            <a:off x="1226079" y="1377595"/>
-            <a:ext cx="9340322" cy="4636518"/>
-          </a:xfrm>
-          <a:prstGeom prst="rect">
-            <a:avLst/>
-          </a:prstGeom>
-        </p:spPr>
-      </p:pic>
     </p:spTree>
     <p:extLst>
       <p:ext uri="{BB962C8B-B14F-4D97-AF65-F5344CB8AC3E}">
-        <p14:creationId xmlns:p14="http://schemas.microsoft.com/office/powerpoint/2010/main" val="3855355408"/>
+        <p14:creationId xmlns:p14="http://schemas.microsoft.com/office/powerpoint/2010/main" val="1057576518"/>
       </p:ext>
     </p:extLst>
   </p:cSld>
@@ -3953,7 +3949,7 @@
         <p:cNvPr id="1" name="">
           <a:extLst>
             <a:ext uri="{FF2B5EF4-FFF2-40B4-BE49-F238E27FC236}">
-              <a16:creationId xmlns:a16="http://schemas.microsoft.com/office/drawing/2014/main" id="{63E9CC9B-B87B-420C-88B5-472CF2003311}"/>
+              <a16:creationId xmlns:a16="http://schemas.microsoft.com/office/drawing/2014/main" id="{24279C15-E268-43B1-8BA2-6F7C134293A1}"/>
             </a:ext>
           </a:extLst>
         </p:cNvPr>
@@ -3973,7 +3969,7 @@
           <p:cNvPr id="2" name="Title 1">
             <a:extLst>
               <a:ext uri="{FF2B5EF4-FFF2-40B4-BE49-F238E27FC236}">
-                <a16:creationId xmlns:a16="http://schemas.microsoft.com/office/drawing/2014/main" id="{32E9DEDB-3EAB-E4BF-FE1B-3F9D7627EF4D}"/>
+                <a16:creationId xmlns:a16="http://schemas.microsoft.com/office/drawing/2014/main" id="{3D603043-2DCA-1BFF-EDFF-156377762921}"/>
               </a:ext>
             </a:extLst>
           </p:cNvPr>
@@ -3992,17 +3988,13 @@
         </p:spPr>
         <p:txBody>
           <a:bodyPr>
-            <a:normAutofit/>
+            <a:normAutofit fontScale="90000"/>
           </a:bodyPr>
           <a:lstStyle/>
           <a:p>
             <a:r>
-              <a:rPr lang="es-CR" sz="3600" dirty="0"/>
-              <a:t>D</a:t>
-            </a:r>
-            <a:r>
               <a:rPr lang="en-US" sz="3600" dirty="0"/>
-              <a:t>CF Valuation</a:t>
+              <a:t>Strategic Diversification Through LNG: Low Correlation Unlocks Portfolio Resilience</a:t>
             </a:r>
           </a:p>
         </p:txBody>
@@ -4012,7 +4004,7 @@
           <p:cNvPr id="6" name="Title 1">
             <a:extLst>
               <a:ext uri="{FF2B5EF4-FFF2-40B4-BE49-F238E27FC236}">
-                <a16:creationId xmlns:a16="http://schemas.microsoft.com/office/drawing/2014/main" id="{A346A5D0-E3B3-5881-6429-7BD1DA1BEC08}"/>
+                <a16:creationId xmlns:a16="http://schemas.microsoft.com/office/drawing/2014/main" id="{C4CD770F-AFAD-C450-8452-B75329FC22C0}"/>
               </a:ext>
             </a:extLst>
           </p:cNvPr>
@@ -4023,7 +4015,7 @@
         </p:nvSpPr>
         <p:spPr>
           <a:xfrm>
-            <a:off x="709612" y="689941"/>
+            <a:off x="709611" y="833429"/>
             <a:ext cx="10772775" cy="483998"/>
           </a:xfrm>
           <a:prstGeom prst="rect">
@@ -4056,7 +4048,7 @@
           <a:p>
             <a:r>
               <a:rPr lang="en-US" sz="1800" dirty="0"/>
-              <a:t>Cheniere’s  ~12x P/E compares favorably to peers trading 20-35x earnings.</a:t>
+              <a:t>LNG demonstrates independence from traditional tech and industrial holdings</a:t>
             </a:r>
           </a:p>
         </p:txBody>
@@ -4066,7 +4058,7 @@
           <p:cNvPr id="4" name="TextBox 3">
             <a:extLst>
               <a:ext uri="{FF2B5EF4-FFF2-40B4-BE49-F238E27FC236}">
-                <a16:creationId xmlns:a16="http://schemas.microsoft.com/office/drawing/2014/main" id="{82497020-C793-60D4-1051-A611624CC743}"/>
+                <a16:creationId xmlns:a16="http://schemas.microsoft.com/office/drawing/2014/main" id="{6DA75E8B-A254-822F-7E25-48D087DACB7D}"/>
               </a:ext>
             </a:extLst>
           </p:cNvPr>
@@ -4108,10 +4100,135 @@
           </a:p>
         </p:txBody>
       </p:sp>
+      <p:pic>
+        <p:nvPicPr>
+          <p:cNvPr id="5" name="Picture 4">
+            <a:extLst>
+              <a:ext uri="{FF2B5EF4-FFF2-40B4-BE49-F238E27FC236}">
+                <a16:creationId xmlns:a16="http://schemas.microsoft.com/office/drawing/2014/main" id="{BD784480-1A9B-F31F-6AEA-BD7026719199}"/>
+              </a:ext>
+            </a:extLst>
+          </p:cNvPr>
+          <p:cNvPicPr>
+            <a:picLocks noChangeAspect="1"/>
+          </p:cNvPicPr>
+          <p:nvPr/>
+        </p:nvPicPr>
+        <p:blipFill>
+          <a:blip r:embed="rId2">
+            <a:extLst>
+              <a:ext uri="{28A0092B-C50C-407E-A947-70E740481C1C}">
+                <a14:useLocalDpi xmlns:a14="http://schemas.microsoft.com/office/drawing/2010/main" val="0"/>
+              </a:ext>
+            </a:extLst>
+          </a:blip>
+          <a:stretch>
+            <a:fillRect/>
+          </a:stretch>
+        </p:blipFill>
+        <p:spPr>
+          <a:xfrm>
+            <a:off x="6244455" y="1621602"/>
+            <a:ext cx="5421352" cy="4059936"/>
+          </a:xfrm>
+          <a:prstGeom prst="rect">
+            <a:avLst/>
+          </a:prstGeom>
+        </p:spPr>
+      </p:pic>
+      <p:pic>
+        <p:nvPicPr>
+          <p:cNvPr id="8" name="Picture 7">
+            <a:extLst>
+              <a:ext uri="{FF2B5EF4-FFF2-40B4-BE49-F238E27FC236}">
+                <a16:creationId xmlns:a16="http://schemas.microsoft.com/office/drawing/2014/main" id="{718CE3CC-A0A6-FD00-9F62-A7CAC284048D}"/>
+              </a:ext>
+            </a:extLst>
+          </p:cNvPr>
+          <p:cNvPicPr>
+            <a:picLocks noChangeAspect="1"/>
+          </p:cNvPicPr>
+          <p:nvPr/>
+        </p:nvPicPr>
+        <p:blipFill>
+          <a:blip r:embed="rId3">
+            <a:extLst>
+              <a:ext uri="{28A0092B-C50C-407E-A947-70E740481C1C}">
+                <a14:useLocalDpi xmlns:a14="http://schemas.microsoft.com/office/drawing/2010/main" val="0"/>
+              </a:ext>
+            </a:extLst>
+          </a:blip>
+          <a:srcRect r="9297"/>
+          <a:stretch>
+            <a:fillRect/>
+          </a:stretch>
+        </p:blipFill>
+        <p:spPr>
+          <a:xfrm>
+            <a:off x="1035804" y="1623926"/>
+            <a:ext cx="4911742" cy="4057612"/>
+          </a:xfrm>
+          <a:prstGeom prst="rect">
+            <a:avLst/>
+          </a:prstGeom>
+        </p:spPr>
+      </p:pic>
+      <p:sp>
+        <p:nvSpPr>
+          <p:cNvPr id="9" name="Rectangle 8">
+            <a:extLst>
+              <a:ext uri="{FF2B5EF4-FFF2-40B4-BE49-F238E27FC236}">
+                <a16:creationId xmlns:a16="http://schemas.microsoft.com/office/drawing/2014/main" id="{FB53B205-C75D-D662-7449-C7305D956CD6}"/>
+              </a:ext>
+            </a:extLst>
+          </p:cNvPr>
+          <p:cNvSpPr/>
+          <p:nvPr/>
+        </p:nvSpPr>
+        <p:spPr>
+          <a:xfrm>
+            <a:off x="965199" y="3429000"/>
+            <a:ext cx="10517187" cy="338667"/>
+          </a:xfrm>
+          <a:prstGeom prst="rect">
+            <a:avLst/>
+          </a:prstGeom>
+          <a:noFill/>
+          <a:ln w="28575">
+            <a:solidFill>
+              <a:srgbClr val="FF0000"/>
+            </a:solidFill>
+          </a:ln>
+        </p:spPr>
+        <p:style>
+          <a:lnRef idx="2">
+            <a:schemeClr val="accent1">
+              <a:shade val="15000"/>
+            </a:schemeClr>
+          </a:lnRef>
+          <a:fillRef idx="1">
+            <a:schemeClr val="accent1"/>
+          </a:fillRef>
+          <a:effectRef idx="0">
+            <a:schemeClr val="accent1"/>
+          </a:effectRef>
+          <a:fontRef idx="minor">
+            <a:schemeClr val="lt1"/>
+          </a:fontRef>
+        </p:style>
+        <p:txBody>
+          <a:bodyPr rtlCol="0" anchor="ctr"/>
+          <a:lstStyle/>
+          <a:p>
+            <a:pPr algn="ctr"/>
+            <a:endParaRPr lang="en-US"/>
+          </a:p>
+        </p:txBody>
+      </p:sp>
     </p:spTree>
     <p:extLst>
       <p:ext uri="{BB962C8B-B14F-4D97-AF65-F5344CB8AC3E}">
-        <p14:creationId xmlns:p14="http://schemas.microsoft.com/office/powerpoint/2010/main" val="1057576518"/>
+        <p14:creationId xmlns:p14="http://schemas.microsoft.com/office/powerpoint/2010/main" val="3734896055"/>
       </p:ext>
     </p:extLst>
   </p:cSld>
@@ -4129,7 +4246,7 @@
         <p:cNvPr id="1" name="">
           <a:extLst>
             <a:ext uri="{FF2B5EF4-FFF2-40B4-BE49-F238E27FC236}">
-              <a16:creationId xmlns:a16="http://schemas.microsoft.com/office/drawing/2014/main" id="{24279C15-E268-43B1-8BA2-6F7C134293A1}"/>
+              <a16:creationId xmlns:a16="http://schemas.microsoft.com/office/drawing/2014/main" id="{A174EF3A-F17F-AB89-E37D-6F7A14610510}"/>
             </a:ext>
           </a:extLst>
         </p:cNvPr>
@@ -4149,7 +4266,7 @@
           <p:cNvPr id="2" name="Title 1">
             <a:extLst>
               <a:ext uri="{FF2B5EF4-FFF2-40B4-BE49-F238E27FC236}">
-                <a16:creationId xmlns:a16="http://schemas.microsoft.com/office/drawing/2014/main" id="{3D603043-2DCA-1BFF-EDFF-156377762921}"/>
+                <a16:creationId xmlns:a16="http://schemas.microsoft.com/office/drawing/2014/main" id="{3DC66AFF-67BA-4108-674F-BC78B6149993}"/>
               </a:ext>
             </a:extLst>
           </p:cNvPr>
@@ -4174,11 +4291,19 @@
           <a:p>
             <a:r>
               <a:rPr lang="es-CR" sz="3600" dirty="0"/>
-              <a:t>Portfolio </a:t>
+              <a:t>Target </a:t>
             </a:r>
             <a:r>
               <a:rPr lang="es-CR" sz="3600" dirty="0" err="1"/>
-              <a:t>fit</a:t>
+              <a:t>Prices</a:t>
+            </a:r>
+            <a:r>
+              <a:rPr lang="es-CR" sz="3600" dirty="0"/>
+              <a:t> &amp; </a:t>
+            </a:r>
+            <a:r>
+              <a:rPr lang="es-CR" sz="3600" dirty="0" err="1"/>
+              <a:t>Consensus</a:t>
             </a:r>
             <a:endParaRPr lang="en-US" sz="3600" dirty="0"/>
           </a:p>
@@ -4189,7 +4314,7 @@
           <p:cNvPr id="6" name="Title 1">
             <a:extLst>
               <a:ext uri="{FF2B5EF4-FFF2-40B4-BE49-F238E27FC236}">
-                <a16:creationId xmlns:a16="http://schemas.microsoft.com/office/drawing/2014/main" id="{C4CD770F-AFAD-C450-8452-B75329FC22C0}"/>
+                <a16:creationId xmlns:a16="http://schemas.microsoft.com/office/drawing/2014/main" id="{CF477145-9A4F-53FB-81D2-75328C9393EC}"/>
               </a:ext>
             </a:extLst>
           </p:cNvPr>
@@ -4233,7 +4358,7 @@
           <a:p>
             <a:r>
               <a:rPr lang="en-US" sz="1800" dirty="0"/>
-              <a:t>Cheniere’s  ~12x P/E compares favorably to peers trading 20-35x earnings.</a:t>
+              <a:t>Analyst Consensus Points to Strong Upside</a:t>
             </a:r>
           </a:p>
         </p:txBody>
@@ -4243,7 +4368,7 @@
           <p:cNvPr id="4" name="TextBox 3">
             <a:extLst>
               <a:ext uri="{FF2B5EF4-FFF2-40B4-BE49-F238E27FC236}">
-                <a16:creationId xmlns:a16="http://schemas.microsoft.com/office/drawing/2014/main" id="{6DA75E8B-A254-822F-7E25-48D087DACB7D}"/>
+                <a16:creationId xmlns:a16="http://schemas.microsoft.com/office/drawing/2014/main" id="{D637704D-98E0-C8AA-7FC4-5ECE08C0238E}"/>
               </a:ext>
             </a:extLst>
           </p:cNvPr>
@@ -4276,11 +4401,170 @@
             </a:r>
             <a:r>
               <a:rPr lang="en-US" sz="1050" dirty="0" err="1"/>
-              <a:t>FinViz</a:t>
+              <a:t>Factset</a:t>
             </a:r>
             <a:r>
               <a:rPr lang="en-US" sz="1050" dirty="0"/>
               <a:t>.</a:t>
+            </a:r>
+          </a:p>
+        </p:txBody>
+      </p:sp>
+      <p:pic>
+        <p:nvPicPr>
+          <p:cNvPr id="5" name="Picture 4">
+            <a:extLst>
+              <a:ext uri="{FF2B5EF4-FFF2-40B4-BE49-F238E27FC236}">
+                <a16:creationId xmlns:a16="http://schemas.microsoft.com/office/drawing/2014/main" id="{FE9E18CF-8934-27DC-1623-68662016A588}"/>
+              </a:ext>
+            </a:extLst>
+          </p:cNvPr>
+          <p:cNvPicPr>
+            <a:picLocks noChangeAspect="1"/>
+          </p:cNvPicPr>
+          <p:nvPr/>
+        </p:nvPicPr>
+        <p:blipFill>
+          <a:blip r:embed="rId2"/>
+          <a:stretch>
+            <a:fillRect/>
+          </a:stretch>
+        </p:blipFill>
+        <p:spPr>
+          <a:xfrm>
+            <a:off x="953432" y="1218604"/>
+            <a:ext cx="8705322" cy="2317604"/>
+          </a:xfrm>
+          <a:prstGeom prst="rect">
+            <a:avLst/>
+          </a:prstGeom>
+        </p:spPr>
+      </p:pic>
+      <p:pic>
+        <p:nvPicPr>
+          <p:cNvPr id="8" name="Picture 7">
+            <a:extLst>
+              <a:ext uri="{FF2B5EF4-FFF2-40B4-BE49-F238E27FC236}">
+                <a16:creationId xmlns:a16="http://schemas.microsoft.com/office/drawing/2014/main" id="{8FE6E7B5-BD16-ECD4-6935-6A38357CCEC3}"/>
+              </a:ext>
+            </a:extLst>
+          </p:cNvPr>
+          <p:cNvPicPr>
+            <a:picLocks noChangeAspect="1"/>
+          </p:cNvPicPr>
+          <p:nvPr/>
+        </p:nvPicPr>
+        <p:blipFill>
+          <a:blip r:embed="rId3"/>
+          <a:stretch>
+            <a:fillRect/>
+          </a:stretch>
+        </p:blipFill>
+        <p:spPr>
+          <a:xfrm>
+            <a:off x="2340253" y="3580873"/>
+            <a:ext cx="8090681" cy="2868890"/>
+          </a:xfrm>
+          <a:prstGeom prst="rect">
+            <a:avLst/>
+          </a:prstGeom>
+        </p:spPr>
+      </p:pic>
+      <p:sp>
+        <p:nvSpPr>
+          <p:cNvPr id="9" name="Rectangle 8">
+            <a:extLst>
+              <a:ext uri="{FF2B5EF4-FFF2-40B4-BE49-F238E27FC236}">
+                <a16:creationId xmlns:a16="http://schemas.microsoft.com/office/drawing/2014/main" id="{72A068CD-ED39-4289-32D6-B4AB6B058882}"/>
+              </a:ext>
+            </a:extLst>
+          </p:cNvPr>
+          <p:cNvSpPr/>
+          <p:nvPr/>
+        </p:nvSpPr>
+        <p:spPr>
+          <a:xfrm>
+            <a:off x="9084733" y="3536208"/>
+            <a:ext cx="1574800" cy="3007597"/>
+          </a:xfrm>
+          <a:prstGeom prst="rect">
+            <a:avLst/>
+          </a:prstGeom>
+          <a:noFill/>
+          <a:ln w="28575">
+            <a:solidFill>
+              <a:srgbClr val="FF0000"/>
+            </a:solidFill>
+          </a:ln>
+        </p:spPr>
+        <p:style>
+          <a:lnRef idx="2">
+            <a:schemeClr val="accent1">
+              <a:shade val="15000"/>
+            </a:schemeClr>
+          </a:lnRef>
+          <a:fillRef idx="1">
+            <a:schemeClr val="accent1"/>
+          </a:fillRef>
+          <a:effectRef idx="0">
+            <a:schemeClr val="accent1"/>
+          </a:effectRef>
+          <a:fontRef idx="minor">
+            <a:schemeClr val="lt1"/>
+          </a:fontRef>
+        </p:style>
+        <p:txBody>
+          <a:bodyPr rtlCol="0" anchor="ctr"/>
+          <a:lstStyle/>
+          <a:p>
+            <a:pPr algn="ctr"/>
+            <a:endParaRPr lang="en-US"/>
+          </a:p>
+        </p:txBody>
+      </p:sp>
+      <p:sp>
+        <p:nvSpPr>
+          <p:cNvPr id="10" name="TextBox 9">
+            <a:extLst>
+              <a:ext uri="{FF2B5EF4-FFF2-40B4-BE49-F238E27FC236}">
+                <a16:creationId xmlns:a16="http://schemas.microsoft.com/office/drawing/2014/main" id="{6E64696A-3570-4D99-D008-3D4CD3D0FB7E}"/>
+              </a:ext>
+            </a:extLst>
+          </p:cNvPr>
+          <p:cNvSpPr txBox="1"/>
+          <p:nvPr/>
+        </p:nvSpPr>
+        <p:spPr>
+          <a:xfrm>
+            <a:off x="10220853" y="3137126"/>
+            <a:ext cx="1261534" cy="369332"/>
+          </a:xfrm>
+          <a:prstGeom prst="rect">
+            <a:avLst/>
+          </a:prstGeom>
+          <a:noFill/>
+        </p:spPr>
+        <p:txBody>
+          <a:bodyPr wrap="square" rtlCol="0">
+            <a:spAutoFit/>
+          </a:bodyPr>
+          <a:lstStyle/>
+          <a:p>
+            <a:r>
+              <a:rPr lang="en-US" b="1" dirty="0">
+                <a:solidFill>
+                  <a:srgbClr val="FF0000"/>
+                </a:solidFill>
+              </a:rPr>
+              <a:t>AVG: </a:t>
+            </a:r>
+            <a:r>
+              <a:rPr lang="en-US" dirty="0">
+                <a:solidFill>
+                  <a:srgbClr val="FF0000"/>
+                </a:solidFill>
+              </a:rPr>
+              <a:t>21.1%</a:t>
             </a:r>
           </a:p>
         </p:txBody>
@@ -4288,7 +4572,7 @@
     </p:spTree>
     <p:extLst>
       <p:ext uri="{BB962C8B-B14F-4D97-AF65-F5344CB8AC3E}">
-        <p14:creationId xmlns:p14="http://schemas.microsoft.com/office/powerpoint/2010/main" val="3734896055"/>
+        <p14:creationId xmlns:p14="http://schemas.microsoft.com/office/powerpoint/2010/main" val="652268147"/>
       </p:ext>
     </p:extLst>
   </p:cSld>
@@ -4299,6 +4583,426 @@
 </file>
 
 <file path=ppt/slides/slide14.xml><?xml version="1.0" encoding="utf-8"?>
+<p:sld xmlns:a="http://schemas.openxmlformats.org/drawingml/2006/main" xmlns:r="http://schemas.openxmlformats.org/officeDocument/2006/relationships" xmlns:p="http://schemas.openxmlformats.org/presentationml/2006/main">
+  <p:cSld>
+    <p:spTree>
+      <p:nvGrpSpPr>
+        <p:cNvPr id="1" name="">
+          <a:extLst>
+            <a:ext uri="{FF2B5EF4-FFF2-40B4-BE49-F238E27FC236}">
+              <a16:creationId xmlns:a16="http://schemas.microsoft.com/office/drawing/2014/main" id="{52DE51A7-7E7D-E523-C456-697E3562997A}"/>
+            </a:ext>
+          </a:extLst>
+        </p:cNvPr>
+        <p:cNvGrpSpPr/>
+        <p:nvPr/>
+      </p:nvGrpSpPr>
+      <p:grpSpPr>
+        <a:xfrm>
+          <a:off x="0" y="0"/>
+          <a:ext cx="0" cy="0"/>
+          <a:chOff x="0" y="0"/>
+          <a:chExt cx="0" cy="0"/>
+        </a:xfrm>
+      </p:grpSpPr>
+      <p:sp>
+        <p:nvSpPr>
+          <p:cNvPr id="2" name="Title 1">
+            <a:extLst>
+              <a:ext uri="{FF2B5EF4-FFF2-40B4-BE49-F238E27FC236}">
+                <a16:creationId xmlns:a16="http://schemas.microsoft.com/office/drawing/2014/main" id="{BE19D207-9B89-F29D-FDD0-E6BB84A0891E}"/>
+              </a:ext>
+            </a:extLst>
+          </p:cNvPr>
+          <p:cNvSpPr>
+            <a:spLocks noGrp="1"/>
+          </p:cNvSpPr>
+          <p:nvPr>
+            <p:ph type="title"/>
+          </p:nvPr>
+        </p:nvSpPr>
+        <p:spPr>
+          <a:xfrm>
+            <a:off x="709612" y="130110"/>
+            <a:ext cx="10772775" cy="768053"/>
+          </a:xfrm>
+        </p:spPr>
+        <p:txBody>
+          <a:bodyPr>
+            <a:normAutofit/>
+          </a:bodyPr>
+          <a:lstStyle/>
+          <a:p>
+            <a:r>
+              <a:rPr lang="es-CR" sz="3600" dirty="0" err="1"/>
+              <a:t>Technical</a:t>
+            </a:r>
+            <a:r>
+              <a:rPr lang="es-CR" sz="3600" dirty="0"/>
+              <a:t> </a:t>
+            </a:r>
+            <a:r>
+              <a:rPr lang="es-CR" sz="3600" dirty="0" err="1"/>
+              <a:t>Analysis</a:t>
+            </a:r>
+            <a:endParaRPr lang="en-US" sz="3600" dirty="0"/>
+          </a:p>
+        </p:txBody>
+      </p:sp>
+      <p:sp>
+        <p:nvSpPr>
+          <p:cNvPr id="4" name="TextBox 3">
+            <a:extLst>
+              <a:ext uri="{FF2B5EF4-FFF2-40B4-BE49-F238E27FC236}">
+                <a16:creationId xmlns:a16="http://schemas.microsoft.com/office/drawing/2014/main" id="{A1263211-AB32-81F3-5081-DE73157566DB}"/>
+              </a:ext>
+            </a:extLst>
+          </p:cNvPr>
+          <p:cNvSpPr txBox="1"/>
+          <p:nvPr/>
+        </p:nvSpPr>
+        <p:spPr>
+          <a:xfrm>
+            <a:off x="709612" y="6289889"/>
+            <a:ext cx="10669587" cy="253916"/>
+          </a:xfrm>
+          <a:prstGeom prst="rect">
+            <a:avLst/>
+          </a:prstGeom>
+          <a:noFill/>
+        </p:spPr>
+        <p:txBody>
+          <a:bodyPr wrap="square" rtlCol="0">
+            <a:spAutoFit/>
+          </a:bodyPr>
+          <a:lstStyle/>
+          <a:p>
+            <a:r>
+              <a:rPr lang="es-CR" sz="1050" b="1" dirty="0" err="1"/>
+              <a:t>Source</a:t>
+            </a:r>
+            <a:r>
+              <a:rPr lang="es-CR" sz="1050" dirty="0"/>
+              <a:t>: </a:t>
+            </a:r>
+            <a:r>
+              <a:rPr lang="en-US" sz="1050" dirty="0" err="1"/>
+              <a:t>FinViz</a:t>
+            </a:r>
+            <a:r>
+              <a:rPr lang="en-US" sz="1050" dirty="0"/>
+              <a:t>.</a:t>
+            </a:r>
+          </a:p>
+        </p:txBody>
+      </p:sp>
+      <p:pic>
+        <p:nvPicPr>
+          <p:cNvPr id="7" name="Picture 6">
+            <a:extLst>
+              <a:ext uri="{FF2B5EF4-FFF2-40B4-BE49-F238E27FC236}">
+                <a16:creationId xmlns:a16="http://schemas.microsoft.com/office/drawing/2014/main" id="{A8907535-134F-C41C-FE4A-C80101816379}"/>
+              </a:ext>
+            </a:extLst>
+          </p:cNvPr>
+          <p:cNvPicPr>
+            <a:picLocks noChangeAspect="1"/>
+          </p:cNvPicPr>
+          <p:nvPr/>
+        </p:nvPicPr>
+        <p:blipFill>
+          <a:blip r:embed="rId2"/>
+          <a:stretch>
+            <a:fillRect/>
+          </a:stretch>
+        </p:blipFill>
+        <p:spPr>
+          <a:xfrm>
+            <a:off x="792512" y="1176876"/>
+            <a:ext cx="11043886" cy="4504247"/>
+          </a:xfrm>
+          <a:prstGeom prst="rect">
+            <a:avLst/>
+          </a:prstGeom>
+        </p:spPr>
+      </p:pic>
+    </p:spTree>
+    <p:extLst>
+      <p:ext uri="{BB962C8B-B14F-4D97-AF65-F5344CB8AC3E}">
+        <p14:creationId xmlns:p14="http://schemas.microsoft.com/office/powerpoint/2010/main" val="3876558977"/>
+      </p:ext>
+    </p:extLst>
+  </p:cSld>
+  <p:clrMapOvr>
+    <a:masterClrMapping/>
+  </p:clrMapOvr>
+</p:sld>
+</file>
+
+<file path=ppt/slides/slide15.xml><?xml version="1.0" encoding="utf-8"?>
+<p:sld xmlns:a="http://schemas.openxmlformats.org/drawingml/2006/main" xmlns:r="http://schemas.openxmlformats.org/officeDocument/2006/relationships" xmlns:p="http://schemas.openxmlformats.org/presentationml/2006/main">
+  <p:cSld>
+    <p:spTree>
+      <p:nvGrpSpPr>
+        <p:cNvPr id="1" name="">
+          <a:extLst>
+            <a:ext uri="{FF2B5EF4-FFF2-40B4-BE49-F238E27FC236}">
+              <a16:creationId xmlns:a16="http://schemas.microsoft.com/office/drawing/2014/main" id="{940FA2D6-51F4-EBB7-572A-6BB0AB42A9C7}"/>
+            </a:ext>
+          </a:extLst>
+        </p:cNvPr>
+        <p:cNvGrpSpPr/>
+        <p:nvPr/>
+      </p:nvGrpSpPr>
+      <p:grpSpPr>
+        <a:xfrm>
+          <a:off x="0" y="0"/>
+          <a:ext cx="0" cy="0"/>
+          <a:chOff x="0" y="0"/>
+          <a:chExt cx="0" cy="0"/>
+        </a:xfrm>
+      </p:grpSpPr>
+      <p:sp>
+        <p:nvSpPr>
+          <p:cNvPr id="2" name="Title 1">
+            <a:extLst>
+              <a:ext uri="{FF2B5EF4-FFF2-40B4-BE49-F238E27FC236}">
+                <a16:creationId xmlns:a16="http://schemas.microsoft.com/office/drawing/2014/main" id="{B4F0DC72-8ADB-43CA-56D0-2FAEF2CA3D67}"/>
+              </a:ext>
+            </a:extLst>
+          </p:cNvPr>
+          <p:cNvSpPr>
+            <a:spLocks noGrp="1"/>
+          </p:cNvSpPr>
+          <p:nvPr>
+            <p:ph type="title"/>
+          </p:nvPr>
+        </p:nvSpPr>
+        <p:spPr>
+          <a:xfrm>
+            <a:off x="709612" y="130110"/>
+            <a:ext cx="10772775" cy="768053"/>
+          </a:xfrm>
+        </p:spPr>
+        <p:txBody>
+          <a:bodyPr>
+            <a:normAutofit/>
+          </a:bodyPr>
+          <a:lstStyle/>
+          <a:p>
+            <a:r>
+              <a:rPr lang="en-US" sz="3600" dirty="0"/>
+              <a:t>Initiate 5-8% Position in Cheniere Energy (LNG)</a:t>
+            </a:r>
+          </a:p>
+        </p:txBody>
+      </p:sp>
+      <p:pic>
+        <p:nvPicPr>
+          <p:cNvPr id="4" name="Picture 3">
+            <a:extLst>
+              <a:ext uri="{FF2B5EF4-FFF2-40B4-BE49-F238E27FC236}">
+                <a16:creationId xmlns:a16="http://schemas.microsoft.com/office/drawing/2014/main" id="{AE435F9F-5A03-3087-83D5-E9226CD872BC}"/>
+              </a:ext>
+            </a:extLst>
+          </p:cNvPr>
+          <p:cNvPicPr>
+            <a:picLocks noChangeAspect="1"/>
+          </p:cNvPicPr>
+          <p:nvPr/>
+        </p:nvPicPr>
+        <p:blipFill>
+          <a:blip r:embed="rId2">
+            <a:extLst>
+              <a:ext uri="{28A0092B-C50C-407E-A947-70E740481C1C}">
+                <a14:useLocalDpi xmlns:a14="http://schemas.microsoft.com/office/drawing/2010/main" val="0"/>
+              </a:ext>
+            </a:extLst>
+          </a:blip>
+          <a:stretch>
+            <a:fillRect/>
+          </a:stretch>
+        </p:blipFill>
+        <p:spPr>
+          <a:xfrm>
+            <a:off x="1376626" y="1419274"/>
+            <a:ext cx="9438746" cy="4670673"/>
+          </a:xfrm>
+          <a:prstGeom prst="rect">
+            <a:avLst/>
+          </a:prstGeom>
+        </p:spPr>
+      </p:pic>
+      <p:sp>
+        <p:nvSpPr>
+          <p:cNvPr id="5" name="TextBox 4">
+            <a:extLst>
+              <a:ext uri="{FF2B5EF4-FFF2-40B4-BE49-F238E27FC236}">
+                <a16:creationId xmlns:a16="http://schemas.microsoft.com/office/drawing/2014/main" id="{231D3789-7B7E-1FD7-1A32-EDCF7E8436C9}"/>
+              </a:ext>
+            </a:extLst>
+          </p:cNvPr>
+          <p:cNvSpPr txBox="1"/>
+          <p:nvPr/>
+        </p:nvSpPr>
+        <p:spPr>
+          <a:xfrm>
+            <a:off x="709612" y="6289889"/>
+            <a:ext cx="10669587" cy="253916"/>
+          </a:xfrm>
+          <a:prstGeom prst="rect">
+            <a:avLst/>
+          </a:prstGeom>
+          <a:noFill/>
+        </p:spPr>
+        <p:txBody>
+          <a:bodyPr wrap="square" rtlCol="0">
+            <a:spAutoFit/>
+          </a:bodyPr>
+          <a:lstStyle/>
+          <a:p>
+            <a:r>
+              <a:rPr lang="es-CR" sz="1050" b="1" dirty="0" err="1"/>
+              <a:t>Source</a:t>
+            </a:r>
+            <a:r>
+              <a:rPr lang="es-CR" sz="1050" dirty="0"/>
+              <a:t>: </a:t>
+            </a:r>
+            <a:r>
+              <a:rPr lang="en-US" sz="1050" dirty="0" err="1"/>
+              <a:t>Finviz</a:t>
+            </a:r>
+            <a:r>
+              <a:rPr lang="en-US" sz="1050" dirty="0"/>
+              <a:t>; Yahoo Finance; </a:t>
+            </a:r>
+            <a:r>
+              <a:rPr lang="en-US" sz="1050" dirty="0" err="1"/>
+              <a:t>TipRanks</a:t>
+            </a:r>
+            <a:r>
+              <a:rPr lang="en-US" sz="1050" dirty="0"/>
+              <a:t> analyst consensus data (Feb 2026).</a:t>
+            </a:r>
+          </a:p>
+        </p:txBody>
+      </p:sp>
+      <p:sp>
+        <p:nvSpPr>
+          <p:cNvPr id="6" name="Title 1">
+            <a:extLst>
+              <a:ext uri="{FF2B5EF4-FFF2-40B4-BE49-F238E27FC236}">
+                <a16:creationId xmlns:a16="http://schemas.microsoft.com/office/drawing/2014/main" id="{7DDA3ED3-E46B-DDE4-E273-C9ABCC87C7DF}"/>
+              </a:ext>
+            </a:extLst>
+          </p:cNvPr>
+          <p:cNvSpPr txBox="1">
+            <a:spLocks/>
+          </p:cNvSpPr>
+          <p:nvPr/>
+        </p:nvSpPr>
+        <p:spPr>
+          <a:xfrm>
+            <a:off x="709612" y="689941"/>
+            <a:ext cx="10772775" cy="483998"/>
+          </a:xfrm>
+          <a:prstGeom prst="rect">
+            <a:avLst/>
+          </a:prstGeom>
+        </p:spPr>
+        <p:txBody>
+          <a:bodyPr vert="horz" lIns="91440" tIns="45720" rIns="91440" bIns="45720" rtlCol="0" anchor="ctr">
+            <a:normAutofit/>
+          </a:bodyPr>
+          <a:lstStyle>
+            <a:lvl1pPr algn="l" defTabSz="914400" rtl="0" eaLnBrk="1" latinLnBrk="0" hangingPunct="1">
+              <a:lnSpc>
+                <a:spcPct val="85000"/>
+              </a:lnSpc>
+              <a:spcBef>
+                <a:spcPct val="0"/>
+              </a:spcBef>
+              <a:buNone/>
+              <a:defRPr sz="5400" kern="1200" spc="-120" baseline="0">
+                <a:solidFill>
+                  <a:schemeClr val="accent1"/>
+                </a:solidFill>
+                <a:latin typeface="+mj-lt"/>
+                <a:ea typeface="+mj-ea"/>
+                <a:cs typeface="+mj-cs"/>
+              </a:defRPr>
+            </a:lvl1pPr>
+          </a:lstStyle>
+          <a:p>
+            <a:r>
+              <a:rPr lang="en-US" sz="2000" dirty="0"/>
+              <a:t>Structural LNG Infrastructure Exposure to Improve Portfolio Risk-Adjusted Returns</a:t>
+            </a:r>
+          </a:p>
+        </p:txBody>
+      </p:sp>
+      <p:pic>
+        <p:nvPicPr>
+          <p:cNvPr id="3074" name="Picture 2" descr="Investor Relations :: Cheniere Energy, Inc. (LNG)">
+            <a:extLst>
+              <a:ext uri="{FF2B5EF4-FFF2-40B4-BE49-F238E27FC236}">
+                <a16:creationId xmlns:a16="http://schemas.microsoft.com/office/drawing/2014/main" id="{8C03EFE6-301D-034A-A8D9-30F499BD6787}"/>
+              </a:ext>
+            </a:extLst>
+          </p:cNvPr>
+          <p:cNvPicPr>
+            <a:picLocks noChangeAspect="1" noChangeArrowheads="1"/>
+          </p:cNvPicPr>
+          <p:nvPr/>
+        </p:nvPicPr>
+        <p:blipFill>
+          <a:blip r:embed="rId3">
+            <a:extLst>
+              <a:ext uri="{28A0092B-C50C-407E-A947-70E740481C1C}">
+                <a14:useLocalDpi xmlns:a14="http://schemas.microsoft.com/office/drawing/2010/main" val="0"/>
+              </a:ext>
+            </a:extLst>
+          </a:blip>
+          <a:srcRect/>
+          <a:stretch>
+            <a:fillRect/>
+          </a:stretch>
+        </p:blipFill>
+        <p:spPr bwMode="auto">
+          <a:xfrm>
+            <a:off x="9292167" y="5078300"/>
+            <a:ext cx="1257300" cy="360426"/>
+          </a:xfrm>
+          <a:prstGeom prst="rect">
+            <a:avLst/>
+          </a:prstGeom>
+          <a:noFill/>
+          <a:extLst>
+            <a:ext uri="{909E8E84-426E-40DD-AFC4-6F175D3DCCD1}">
+              <a14:hiddenFill xmlns:a14="http://schemas.microsoft.com/office/drawing/2010/main">
+                <a:solidFill>
+                  <a:srgbClr val="FFFFFF"/>
+                </a:solidFill>
+              </a14:hiddenFill>
+            </a:ext>
+          </a:extLst>
+        </p:spPr>
+      </p:pic>
+    </p:spTree>
+    <p:extLst>
+      <p:ext uri="{BB962C8B-B14F-4D97-AF65-F5344CB8AC3E}">
+        <p14:creationId xmlns:p14="http://schemas.microsoft.com/office/powerpoint/2010/main" val="291849898"/>
+      </p:ext>
+    </p:extLst>
+  </p:cSld>
+  <p:clrMapOvr>
+    <a:masterClrMapping/>
+  </p:clrMapOvr>
+</p:sld>
+</file>
+
+<file path=ppt/slides/slide16.xml><?xml version="1.0" encoding="utf-8"?>
 <p:sld xmlns:a="http://schemas.openxmlformats.org/drawingml/2006/main" xmlns:r="http://schemas.openxmlformats.org/officeDocument/2006/relationships" xmlns:p="http://schemas.openxmlformats.org/presentationml/2006/main">
   <p:cSld>
     <p:spTree>
@@ -4477,7 +5181,7 @@
         <p:spPr>
           <a:xfrm>
             <a:off x="1001609" y="1173939"/>
-            <a:ext cx="4306992" cy="4678204"/>
+            <a:ext cx="4306992" cy="4893647"/>
           </a:xfrm>
           <a:prstGeom prst="rect">
             <a:avLst/>
@@ -4640,10 +5344,19 @@
               <a:buChar char="•"/>
             </a:pPr>
             <a:r>
-              <a:rPr lang="en-US" sz="1400" dirty="0" err="1"/>
-              <a:t>BuybacksDividends</a:t>
-            </a:r>
-            <a:endParaRPr lang="en-US" sz="1400" dirty="0"/>
+              <a:rPr lang="en-US" sz="1400" dirty="0"/>
+              <a:t>Buybacks</a:t>
+            </a:r>
+          </a:p>
+          <a:p>
+            <a:pPr marL="285750" indent="-285750">
+              <a:buFont typeface="Arial" panose="020B0604020202020204" pitchFamily="34" charset="0"/>
+              <a:buChar char="•"/>
+            </a:pPr>
+            <a:r>
+              <a:rPr lang="en-US" sz="1400" dirty="0"/>
+              <a:t>Dividends</a:t>
+            </a:r>
           </a:p>
         </p:txBody>
       </p:sp>
@@ -4662,7 +5375,7 @@
         <p:spPr>
           <a:xfrm>
             <a:off x="6555742" y="1173939"/>
-            <a:ext cx="4306992" cy="3600986"/>
+            <a:ext cx="4306992" cy="4585871"/>
           </a:xfrm>
           <a:prstGeom prst="rect">
             <a:avLst/>
@@ -4676,13 +5389,13 @@
           <a:lstStyle/>
           <a:p>
             <a:r>
-              <a:rPr lang="en-US" b="1" dirty="0"/>
+              <a:rPr lang="en-US" sz="2000" b="1" dirty="0"/>
               <a:t>Cons</a:t>
             </a:r>
             <a:br>
-              <a:rPr lang="en-US" sz="1400" b="1" dirty="0"/>
+              <a:rPr lang="en-US" sz="1600" b="1" dirty="0"/>
             </a:br>
-            <a:endParaRPr lang="en-US" sz="1400" b="1" dirty="0"/>
+            <a:endParaRPr lang="en-US" sz="1600" b="1" dirty="0"/>
           </a:p>
           <a:p>
             <a:pPr marL="285750" indent="-285750">
@@ -4690,25 +5403,25 @@
               <a:buChar char="•"/>
             </a:pPr>
             <a:r>
-              <a:rPr lang="en-US" sz="1400" dirty="0"/>
+              <a:rPr lang="en-US" sz="1600" dirty="0"/>
               <a:t>Profitability </a:t>
             </a:r>
             <a:r>
-              <a:rPr lang="en-US" sz="1400" b="1" dirty="0"/>
+              <a:rPr lang="en-US" sz="1600" b="1" dirty="0"/>
               <a:t>exposed</a:t>
             </a:r>
             <a:r>
-              <a:rPr lang="en-US" sz="1400" dirty="0"/>
+              <a:rPr lang="en-US" sz="1600" dirty="0"/>
               <a:t> to compression in the spread between </a:t>
             </a:r>
             <a:r>
-              <a:rPr lang="en-US" sz="1400" b="1" dirty="0"/>
+              <a:rPr lang="en-US" sz="1600" b="1" dirty="0"/>
               <a:t>U.S. natural gas prices and global LNG pricing</a:t>
             </a:r>
             <a:br>
-              <a:rPr lang="en-US" sz="1400" dirty="0"/>
+              <a:rPr lang="en-US" sz="1600" dirty="0"/>
             </a:br>
-            <a:endParaRPr lang="en-US" sz="1400" dirty="0"/>
+            <a:endParaRPr lang="en-US" sz="1600" dirty="0"/>
           </a:p>
           <a:p>
             <a:pPr marL="285750" indent="-285750">
@@ -4716,21 +5429,21 @@
               <a:buChar char="•"/>
             </a:pPr>
             <a:r>
-              <a:rPr lang="en-US" sz="1400" dirty="0"/>
+              <a:rPr lang="en-US" sz="1600" dirty="0"/>
               <a:t>High capital intensity and leverage increase </a:t>
             </a:r>
             <a:r>
-              <a:rPr lang="en-US" sz="1400" b="1" dirty="0"/>
+              <a:rPr lang="en-US" sz="1600" b="1" dirty="0"/>
               <a:t>sensitivity to interest rates</a:t>
             </a:r>
             <a:r>
-              <a:rPr lang="en-US" sz="1400" dirty="0"/>
+              <a:rPr lang="en-US" sz="1600" dirty="0"/>
               <a:t> and refinancing conditions</a:t>
             </a:r>
             <a:br>
-              <a:rPr lang="en-US" sz="1400" dirty="0"/>
+              <a:rPr lang="en-US" sz="1600" dirty="0"/>
             </a:br>
-            <a:endParaRPr lang="en-US" sz="1400" dirty="0"/>
+            <a:endParaRPr lang="en-US" sz="1600" dirty="0"/>
           </a:p>
           <a:p>
             <a:pPr marL="285750" indent="-285750">
@@ -4738,13 +5451,13 @@
               <a:buChar char="•"/>
             </a:pPr>
             <a:r>
-              <a:rPr lang="en-US" sz="1400" dirty="0"/>
+              <a:rPr lang="en-US" sz="1600" dirty="0"/>
               <a:t>Execution risk related to Corpus Christi Stage 3 expansion and future capacity additions</a:t>
             </a:r>
             <a:br>
-              <a:rPr lang="en-US" sz="1400" dirty="0"/>
+              <a:rPr lang="en-US" sz="1600" dirty="0"/>
             </a:br>
-            <a:endParaRPr lang="en-US" sz="1400" dirty="0"/>
+            <a:endParaRPr lang="en-US" sz="1600" dirty="0"/>
           </a:p>
           <a:p>
             <a:pPr marL="285750" indent="-285750">
@@ -4752,13 +5465,13 @@
               <a:buChar char="•"/>
             </a:pPr>
             <a:r>
-              <a:rPr lang="en-US" sz="1400" dirty="0"/>
+              <a:rPr lang="en-US" sz="1600" dirty="0"/>
               <a:t>Regulatory and export policy risk given U.S. LNG approvals are subject to federal oversight</a:t>
             </a:r>
             <a:br>
-              <a:rPr lang="en-US" sz="1400" dirty="0"/>
+              <a:rPr lang="en-US" sz="1600" dirty="0"/>
             </a:br>
-            <a:endParaRPr lang="en-US" sz="1400" dirty="0"/>
+            <a:endParaRPr lang="en-US" sz="1600" dirty="0"/>
           </a:p>
           <a:p>
             <a:pPr marL="285750" indent="-285750">
@@ -4766,7 +5479,7 @@
               <a:buChar char="•"/>
             </a:pPr>
             <a:r>
-              <a:rPr lang="en-US" sz="1400" dirty="0"/>
+              <a:rPr lang="en-US" sz="1600" dirty="0"/>
               <a:t>Global economic slowdown could reduce LNG demand and pressure export volumes</a:t>
             </a:r>
           </a:p>
@@ -4776,6 +5489,278 @@
     <p:extLst>
       <p:ext uri="{BB962C8B-B14F-4D97-AF65-F5344CB8AC3E}">
         <p14:creationId xmlns:p14="http://schemas.microsoft.com/office/powerpoint/2010/main" val="2934304950"/>
+      </p:ext>
+    </p:extLst>
+  </p:cSld>
+  <p:clrMapOvr>
+    <a:masterClrMapping/>
+  </p:clrMapOvr>
+</p:sld>
+</file>
+
+<file path=ppt/slides/slide17.xml><?xml version="1.0" encoding="utf-8"?>
+<p:sld xmlns:a="http://schemas.openxmlformats.org/drawingml/2006/main" xmlns:r="http://schemas.openxmlformats.org/officeDocument/2006/relationships" xmlns:p="http://schemas.openxmlformats.org/presentationml/2006/main">
+  <p:cSld>
+    <p:spTree>
+      <p:nvGrpSpPr>
+        <p:cNvPr id="1" name="">
+          <a:extLst>
+            <a:ext uri="{FF2B5EF4-FFF2-40B4-BE49-F238E27FC236}">
+              <a16:creationId xmlns:a16="http://schemas.microsoft.com/office/drawing/2014/main" id="{97427E3D-34CB-2303-9CCD-09D47A3FFC9D}"/>
+            </a:ext>
+          </a:extLst>
+        </p:cNvPr>
+        <p:cNvGrpSpPr/>
+        <p:nvPr/>
+      </p:nvGrpSpPr>
+      <p:grpSpPr>
+        <a:xfrm>
+          <a:off x="0" y="0"/>
+          <a:ext cx="0" cy="0"/>
+          <a:chOff x="0" y="0"/>
+          <a:chExt cx="0" cy="0"/>
+        </a:xfrm>
+      </p:grpSpPr>
+      <p:sp>
+        <p:nvSpPr>
+          <p:cNvPr id="2" name="Title 1">
+            <a:extLst>
+              <a:ext uri="{FF2B5EF4-FFF2-40B4-BE49-F238E27FC236}">
+                <a16:creationId xmlns:a16="http://schemas.microsoft.com/office/drawing/2014/main" id="{06511926-C78E-4DB2-FEBA-FCC4A69A16FC}"/>
+              </a:ext>
+            </a:extLst>
+          </p:cNvPr>
+          <p:cNvSpPr>
+            <a:spLocks noGrp="1"/>
+          </p:cNvSpPr>
+          <p:nvPr>
+            <p:ph type="ctrTitle"/>
+          </p:nvPr>
+        </p:nvSpPr>
+        <p:spPr/>
+        <p:txBody>
+          <a:bodyPr/>
+          <a:lstStyle/>
+          <a:p>
+            <a:r>
+              <a:rPr lang="es-CR" dirty="0" err="1"/>
+              <a:t>Appendix</a:t>
+            </a:r>
+            <a:endParaRPr lang="en-US" dirty="0"/>
+          </a:p>
+        </p:txBody>
+      </p:sp>
+      <p:sp>
+        <p:nvSpPr>
+          <p:cNvPr id="3" name="Subtitle 2">
+            <a:extLst>
+              <a:ext uri="{FF2B5EF4-FFF2-40B4-BE49-F238E27FC236}">
+                <a16:creationId xmlns:a16="http://schemas.microsoft.com/office/drawing/2014/main" id="{9BB9FBD3-D176-A23A-F170-E748A7F511B3}"/>
+              </a:ext>
+            </a:extLst>
+          </p:cNvPr>
+          <p:cNvSpPr>
+            <a:spLocks noGrp="1"/>
+          </p:cNvSpPr>
+          <p:nvPr>
+            <p:ph type="subTitle" idx="1"/>
+          </p:nvPr>
+        </p:nvSpPr>
+        <p:spPr/>
+        <p:txBody>
+          <a:bodyPr/>
+          <a:lstStyle/>
+          <a:p>
+            <a:r>
+              <a:rPr lang="es-CR" dirty="0"/>
+              <a:t>Phoenix</a:t>
+            </a:r>
+            <a:endParaRPr lang="en-US" dirty="0"/>
+          </a:p>
+        </p:txBody>
+      </p:sp>
+    </p:spTree>
+    <p:extLst>
+      <p:ext uri="{BB962C8B-B14F-4D97-AF65-F5344CB8AC3E}">
+        <p14:creationId xmlns:p14="http://schemas.microsoft.com/office/powerpoint/2010/main" val="19698390"/>
+      </p:ext>
+    </p:extLst>
+  </p:cSld>
+  <p:clrMapOvr>
+    <a:masterClrMapping/>
+  </p:clrMapOvr>
+</p:sld>
+</file>
+
+<file path=ppt/slides/slide18.xml><?xml version="1.0" encoding="utf-8"?>
+<p:sld xmlns:a="http://schemas.openxmlformats.org/drawingml/2006/main" xmlns:r="http://schemas.openxmlformats.org/officeDocument/2006/relationships" xmlns:p="http://schemas.openxmlformats.org/presentationml/2006/main">
+  <p:cSld>
+    <p:spTree>
+      <p:nvGrpSpPr>
+        <p:cNvPr id="1" name="">
+          <a:extLst>
+            <a:ext uri="{FF2B5EF4-FFF2-40B4-BE49-F238E27FC236}">
+              <a16:creationId xmlns:a16="http://schemas.microsoft.com/office/drawing/2014/main" id="{2C6EE196-5C18-C95D-EA00-0299A6CAFB67}"/>
+            </a:ext>
+          </a:extLst>
+        </p:cNvPr>
+        <p:cNvGrpSpPr/>
+        <p:nvPr/>
+      </p:nvGrpSpPr>
+      <p:grpSpPr>
+        <a:xfrm>
+          <a:off x="0" y="0"/>
+          <a:ext cx="0" cy="0"/>
+          <a:chOff x="0" y="0"/>
+          <a:chExt cx="0" cy="0"/>
+        </a:xfrm>
+      </p:grpSpPr>
+      <p:sp>
+        <p:nvSpPr>
+          <p:cNvPr id="2" name="Title 1">
+            <a:extLst>
+              <a:ext uri="{FF2B5EF4-FFF2-40B4-BE49-F238E27FC236}">
+                <a16:creationId xmlns:a16="http://schemas.microsoft.com/office/drawing/2014/main" id="{46AEF58A-8C66-FDC8-750D-358B0739D1C7}"/>
+              </a:ext>
+            </a:extLst>
+          </p:cNvPr>
+          <p:cNvSpPr>
+            <a:spLocks noGrp="1"/>
+          </p:cNvSpPr>
+          <p:nvPr>
+            <p:ph type="title"/>
+          </p:nvPr>
+        </p:nvSpPr>
+        <p:spPr>
+          <a:xfrm>
+            <a:off x="709612" y="130110"/>
+            <a:ext cx="10772775" cy="768053"/>
+          </a:xfrm>
+        </p:spPr>
+        <p:txBody>
+          <a:bodyPr>
+            <a:normAutofit/>
+          </a:bodyPr>
+          <a:lstStyle/>
+          <a:p>
+            <a:r>
+              <a:rPr lang="en-US" sz="3600" dirty="0"/>
+              <a:t>Financials</a:t>
+            </a:r>
+          </a:p>
+        </p:txBody>
+      </p:sp>
+      <p:sp>
+        <p:nvSpPr>
+          <p:cNvPr id="4" name="TextBox 3">
+            <a:extLst>
+              <a:ext uri="{FF2B5EF4-FFF2-40B4-BE49-F238E27FC236}">
+                <a16:creationId xmlns:a16="http://schemas.microsoft.com/office/drawing/2014/main" id="{AE94A55C-3C2A-AD87-ADA1-30D2F3D5AD36}"/>
+              </a:ext>
+            </a:extLst>
+          </p:cNvPr>
+          <p:cNvSpPr txBox="1"/>
+          <p:nvPr/>
+        </p:nvSpPr>
+        <p:spPr>
+          <a:xfrm>
+            <a:off x="709612" y="6289889"/>
+            <a:ext cx="10669587" cy="253916"/>
+          </a:xfrm>
+          <a:prstGeom prst="rect">
+            <a:avLst/>
+          </a:prstGeom>
+          <a:noFill/>
+        </p:spPr>
+        <p:txBody>
+          <a:bodyPr wrap="square" rtlCol="0">
+            <a:spAutoFit/>
+          </a:bodyPr>
+          <a:lstStyle/>
+          <a:p>
+            <a:r>
+              <a:rPr lang="es-CR" sz="1050" b="1" dirty="0" err="1"/>
+              <a:t>Source</a:t>
+            </a:r>
+            <a:r>
+              <a:rPr lang="es-CR" sz="1050" dirty="0"/>
+              <a:t>: </a:t>
+            </a:r>
+            <a:r>
+              <a:rPr lang="en-US" sz="1050" dirty="0" err="1"/>
+              <a:t>TipRanks</a:t>
+            </a:r>
+            <a:r>
+              <a:rPr lang="en-US" sz="1050" dirty="0"/>
+              <a:t>.</a:t>
+            </a:r>
+          </a:p>
+        </p:txBody>
+      </p:sp>
+      <p:pic>
+        <p:nvPicPr>
+          <p:cNvPr id="5" name="Picture 4">
+            <a:extLst>
+              <a:ext uri="{FF2B5EF4-FFF2-40B4-BE49-F238E27FC236}">
+                <a16:creationId xmlns:a16="http://schemas.microsoft.com/office/drawing/2014/main" id="{1753FA33-94A7-FC2A-BC0F-375717EDB325}"/>
+              </a:ext>
+            </a:extLst>
+          </p:cNvPr>
+          <p:cNvPicPr>
+            <a:picLocks noChangeAspect="1"/>
+          </p:cNvPicPr>
+          <p:nvPr/>
+        </p:nvPicPr>
+        <p:blipFill>
+          <a:blip r:embed="rId2"/>
+          <a:stretch>
+            <a:fillRect/>
+          </a:stretch>
+        </p:blipFill>
+        <p:spPr>
+          <a:xfrm>
+            <a:off x="1600201" y="898163"/>
+            <a:ext cx="7958667" cy="2392449"/>
+          </a:xfrm>
+          <a:prstGeom prst="rect">
+            <a:avLst/>
+          </a:prstGeom>
+        </p:spPr>
+      </p:pic>
+      <p:pic>
+        <p:nvPicPr>
+          <p:cNvPr id="10" name="Picture 9">
+            <a:extLst>
+              <a:ext uri="{FF2B5EF4-FFF2-40B4-BE49-F238E27FC236}">
+                <a16:creationId xmlns:a16="http://schemas.microsoft.com/office/drawing/2014/main" id="{AC5B1965-6FC0-F226-BDD1-B42F026CD4E9}"/>
+              </a:ext>
+            </a:extLst>
+          </p:cNvPr>
+          <p:cNvPicPr>
+            <a:picLocks noChangeAspect="1"/>
+          </p:cNvPicPr>
+          <p:nvPr/>
+        </p:nvPicPr>
+        <p:blipFill>
+          <a:blip r:embed="rId3"/>
+          <a:stretch>
+            <a:fillRect/>
+          </a:stretch>
+        </p:blipFill>
+        <p:spPr>
+          <a:xfrm>
+            <a:off x="2235202" y="3429000"/>
+            <a:ext cx="7918532" cy="3046398"/>
+          </a:xfrm>
+          <a:prstGeom prst="rect">
+            <a:avLst/>
+          </a:prstGeom>
+        </p:spPr>
+      </p:pic>
+    </p:spTree>
+    <p:extLst>
+      <p:ext uri="{BB962C8B-B14F-4D97-AF65-F5344CB8AC3E}">
+        <p14:creationId xmlns:p14="http://schemas.microsoft.com/office/powerpoint/2010/main" val="3177520427"/>
       </p:ext>
     </p:extLst>
   </p:cSld>
@@ -7781,7 +8766,7 @@
         <p:cNvPr id="1" name="">
           <a:extLst>
             <a:ext uri="{FF2B5EF4-FFF2-40B4-BE49-F238E27FC236}">
-              <a16:creationId xmlns:a16="http://schemas.microsoft.com/office/drawing/2014/main" id="{2C6EE196-5C18-C95D-EA00-0299A6CAFB67}"/>
+              <a16:creationId xmlns:a16="http://schemas.microsoft.com/office/drawing/2014/main" id="{AEF47DA7-F3D9-4790-2A75-AC65697DEC05}"/>
             </a:ext>
           </a:extLst>
         </p:cNvPr>
@@ -7801,7 +8786,7 @@
           <p:cNvPr id="2" name="Title 1">
             <a:extLst>
               <a:ext uri="{FF2B5EF4-FFF2-40B4-BE49-F238E27FC236}">
-                <a16:creationId xmlns:a16="http://schemas.microsoft.com/office/drawing/2014/main" id="{46AEF58A-8C66-FDC8-750D-358B0739D1C7}"/>
+                <a16:creationId xmlns:a16="http://schemas.microsoft.com/office/drawing/2014/main" id="{01175F15-DDF8-D354-2B0B-DFEA2F35D25A}"/>
               </a:ext>
             </a:extLst>
           </p:cNvPr>
@@ -7836,7 +8821,7 @@
           <p:cNvPr id="6" name="Title 1">
             <a:extLst>
               <a:ext uri="{FF2B5EF4-FFF2-40B4-BE49-F238E27FC236}">
-                <a16:creationId xmlns:a16="http://schemas.microsoft.com/office/drawing/2014/main" id="{39FD1C2A-3CE2-69CC-EA69-9143386102DB}"/>
+                <a16:creationId xmlns:a16="http://schemas.microsoft.com/office/drawing/2014/main" id="{E982C569-D936-18DC-96ED-1689499C0AD5}"/>
               </a:ext>
             </a:extLst>
           </p:cNvPr>
@@ -7890,7 +8875,7 @@
           <p:cNvPr id="4" name="TextBox 3">
             <a:extLst>
               <a:ext uri="{FF2B5EF4-FFF2-40B4-BE49-F238E27FC236}">
-                <a16:creationId xmlns:a16="http://schemas.microsoft.com/office/drawing/2014/main" id="{AE94A55C-3C2A-AD87-ADA1-30D2F3D5AD36}"/>
+                <a16:creationId xmlns:a16="http://schemas.microsoft.com/office/drawing/2014/main" id="{A3BD51F6-2294-8488-9107-BC71ABC87666}"/>
               </a:ext>
             </a:extLst>
           </p:cNvPr>
@@ -7923,7 +8908,7 @@
             </a:r>
             <a:r>
               <a:rPr lang="en-US" sz="1050" dirty="0" err="1"/>
-              <a:t>TipRanks</a:t>
+              <a:t>FinViz</a:t>
             </a:r>
             <a:r>
               <a:rPr lang="en-US" sz="1050" dirty="0"/>
@@ -7934,10 +8919,10 @@
       </p:sp>
       <p:pic>
         <p:nvPicPr>
-          <p:cNvPr id="5" name="Picture 4">
+          <p:cNvPr id="8" name="Picture 7">
             <a:extLst>
               <a:ext uri="{FF2B5EF4-FFF2-40B4-BE49-F238E27FC236}">
-                <a16:creationId xmlns:a16="http://schemas.microsoft.com/office/drawing/2014/main" id="{1753FA33-94A7-FC2A-BC0F-375717EDB325}"/>
+                <a16:creationId xmlns:a16="http://schemas.microsoft.com/office/drawing/2014/main" id="{F995903A-C7E4-087D-D545-6710807FEE22}"/>
               </a:ext>
             </a:extLst>
           </p:cNvPr>
@@ -7947,55 +8932,86 @@
           <p:nvPr/>
         </p:nvPicPr>
         <p:blipFill>
-          <a:blip r:embed="rId2"/>
+          <a:blip r:embed="rId2">
+            <a:extLst>
+              <a:ext uri="{28A0092B-C50C-407E-A947-70E740481C1C}">
+                <a14:useLocalDpi xmlns:a14="http://schemas.microsoft.com/office/drawing/2010/main" val="0"/>
+              </a:ext>
+            </a:extLst>
+          </a:blip>
+          <a:srcRect l="30694" t="29369" r="30486" b="29239"/>
           <a:stretch>
             <a:fillRect/>
           </a:stretch>
         </p:blipFill>
         <p:spPr>
           <a:xfrm>
-            <a:off x="1828801" y="1218119"/>
-            <a:ext cx="7958667" cy="2392449"/>
+            <a:off x="1600199" y="1651000"/>
+            <a:ext cx="8686801" cy="3931596"/>
           </a:xfrm>
           <a:prstGeom prst="rect">
             <a:avLst/>
           </a:prstGeom>
         </p:spPr>
       </p:pic>
-      <p:pic>
-        <p:nvPicPr>
-          <p:cNvPr id="10" name="Picture 9">
+      <p:sp>
+        <p:nvSpPr>
+          <p:cNvPr id="9" name="Rectangle 8">
             <a:extLst>
               <a:ext uri="{FF2B5EF4-FFF2-40B4-BE49-F238E27FC236}">
-                <a16:creationId xmlns:a16="http://schemas.microsoft.com/office/drawing/2014/main" id="{AC5B1965-6FC0-F226-BDD1-B42F026CD4E9}"/>
+                <a16:creationId xmlns:a16="http://schemas.microsoft.com/office/drawing/2014/main" id="{5E2E30EF-F1E7-C4B1-0EC4-CC296199D4FF}"/>
               </a:ext>
             </a:extLst>
           </p:cNvPr>
-          <p:cNvPicPr>
-            <a:picLocks noChangeAspect="1"/>
-          </p:cNvPicPr>
+          <p:cNvSpPr/>
           <p:nvPr/>
-        </p:nvPicPr>
-        <p:blipFill>
-          <a:blip r:embed="rId3"/>
-          <a:stretch>
-            <a:fillRect/>
-          </a:stretch>
-        </p:blipFill>
-        <p:spPr>
-          <a:xfrm>
-            <a:off x="3064936" y="3577484"/>
-            <a:ext cx="6722532" cy="2586276"/>
+        </p:nvSpPr>
+        <p:spPr>
+          <a:xfrm>
+            <a:off x="1600199" y="2413000"/>
+            <a:ext cx="8585201" cy="355600"/>
           </a:xfrm>
           <a:prstGeom prst="rect">
             <a:avLst/>
           </a:prstGeom>
-        </p:spPr>
-      </p:pic>
+          <a:solidFill>
+            <a:srgbClr val="FFFF00">
+              <a:alpha val="25000"/>
+            </a:srgbClr>
+          </a:solidFill>
+          <a:ln>
+            <a:noFill/>
+          </a:ln>
+        </p:spPr>
+        <p:style>
+          <a:lnRef idx="2">
+            <a:schemeClr val="accent1">
+              <a:shade val="15000"/>
+            </a:schemeClr>
+          </a:lnRef>
+          <a:fillRef idx="1">
+            <a:schemeClr val="accent1"/>
+          </a:fillRef>
+          <a:effectRef idx="0">
+            <a:schemeClr val="accent1"/>
+          </a:effectRef>
+          <a:fontRef idx="minor">
+            <a:schemeClr val="lt1"/>
+          </a:fontRef>
+        </p:style>
+        <p:txBody>
+          <a:bodyPr rtlCol="0" anchor="ctr"/>
+          <a:lstStyle/>
+          <a:p>
+            <a:pPr algn="ctr"/>
+            <a:endParaRPr lang="en-US"/>
+          </a:p>
+        </p:txBody>
+      </p:sp>
     </p:spTree>
     <p:extLst>
       <p:ext uri="{BB962C8B-B14F-4D97-AF65-F5344CB8AC3E}">
-        <p14:creationId xmlns:p14="http://schemas.microsoft.com/office/powerpoint/2010/main" val="3177520427"/>
+        <p14:creationId xmlns:p14="http://schemas.microsoft.com/office/powerpoint/2010/main" val="3854890432"/>
       </p:ext>
     </p:extLst>
   </p:cSld>
